--- a/results/ACN_IDS_Slides.pptx
+++ b/results/ACN_IDS_Slides.pptx
@@ -15,6 +15,7 @@
     <p:sldId id="263" r:id="rId14"/>
     <p:sldId id="264" r:id="rId15"/>
     <p:sldId id="265" r:id="rId16"/>
+    <p:sldId id="266" r:id="rId17"/>
   </p:sldIdLst>
   <p:sldSz cx="12191695" cy="6858000" type="screen4x3"/>
   <p:notesSz cx="6858000" cy="9144000"/>
@@ -3299,6 +3300,265 @@
         </p:nvSpPr>
         <p:spPr>
           <a:xfrm>
+            <a:off x="0" y="0"/>
+            <a:ext cx="164592" cy="6858000"/>
+          </a:xfrm>
+          <a:prstGeom prst="rect">
+            <a:avLst/>
+          </a:prstGeom>
+          <a:solidFill>
+            <a:srgbClr val="1C5CAB"/>
+          </a:solidFill>
+          <a:ln>
+            <a:noFill/>
+          </a:ln>
+        </p:spPr>
+        <p:style>
+          <a:lnRef idx="1">
+            <a:schemeClr val="accent1"/>
+          </a:lnRef>
+          <a:fillRef idx="3">
+            <a:schemeClr val="accent1"/>
+          </a:fillRef>
+          <a:effectRef idx="2">
+            <a:schemeClr val="accent1"/>
+          </a:effectRef>
+          <a:fontRef idx="minor">
+            <a:schemeClr val="lt1"/>
+          </a:fontRef>
+        </p:style>
+        <p:txBody>
+          <a:bodyPr rtlCol="0" anchor="ctr"/>
+          <a:lstStyle/>
+          <a:p>
+            <a:pPr algn="ctr"/>
+          </a:p>
+        </p:txBody>
+      </p:sp>
+      <p:sp>
+        <p:nvSpPr>
+          <p:cNvPr id="3" name="TextBox 2"/>
+          <p:cNvSpPr txBox="1"/>
+          <p:nvPr/>
+        </p:nvSpPr>
+        <p:spPr>
+          <a:xfrm>
+            <a:off x="502920" y="320040"/>
+            <a:ext cx="11155680" cy="822960"/>
+          </a:xfrm>
+          <a:prstGeom prst="rect">
+            <a:avLst/>
+          </a:prstGeom>
+          <a:noFill/>
+        </p:spPr>
+        <p:txBody>
+          <a:bodyPr wrap="square" anchor="t">
+            <a:spAutoFit/>
+          </a:bodyPr>
+          <a:lstStyle/>
+          <a:p>
+            <a:pPr algn="l"/>
+            <a:r>
+              <a:rPr sz="2600" b="1" i="0">
+                <a:solidFill>
+                  <a:srgbClr val="1C5CAB"/>
+                </a:solidFill>
+                <a:latin typeface="Calibri"/>
+              </a:rPr>
+              <a:t>Deployment and takeaways</a:t>
+            </a:r>
+          </a:p>
+        </p:txBody>
+      </p:sp>
+      <p:sp>
+        <p:nvSpPr>
+          <p:cNvPr id="4" name="TextBox 3"/>
+          <p:cNvSpPr txBox="1"/>
+          <p:nvPr/>
+        </p:nvSpPr>
+        <p:spPr>
+          <a:xfrm>
+            <a:off x="640080" y="1371600"/>
+            <a:ext cx="10789920" cy="4754880"/>
+          </a:xfrm>
+          <a:prstGeom prst="rect">
+            <a:avLst/>
+          </a:prstGeom>
+          <a:noFill/>
+        </p:spPr>
+        <p:txBody>
+          <a:bodyPr wrap="square">
+            <a:spAutoFit/>
+          </a:bodyPr>
+          <a:lstStyle/>
+          <a:p>
+            <a:pPr>
+              <a:spcAft>
+                <a:spcPts val="1000"/>
+              </a:spcAft>
+            </a:pPr>
+            <a:r>
+              <a:rPr sz="1700" b="1">
+                <a:solidFill>
+                  <a:srgbClr val="1C5CAB"/>
+                </a:solidFill>
+              </a:rPr>
+              <a:t>•  </a:t>
+            </a:r>
+            <a:r>
+              <a:rPr sz="1700" b="1">
+                <a:solidFill>
+                  <a:srgbClr val="0B0B0B"/>
+                </a:solidFill>
+                <a:latin typeface="Calibri"/>
+              </a:rPr>
+              <a:t>Runs beside the traffic, </a:t>
+            </a:r>
+            <a:r>
+              <a:rPr sz="1700">
+                <a:solidFill>
+                  <a:srgbClr val="0B0B0B"/>
+                </a:solidFill>
+                <a:latin typeface="Calibri"/>
+              </a:rPr>
+              <a:t>not inline: a verdict comes only when the flow ends.</a:t>
+            </a:r>
+          </a:p>
+          <a:p>
+            <a:pPr>
+              <a:spcAft>
+                <a:spcPts val="1000"/>
+              </a:spcAft>
+            </a:pPr>
+            <a:r>
+              <a:rPr sz="1700" b="1">
+                <a:solidFill>
+                  <a:srgbClr val="1C5CAB"/>
+                </a:solidFill>
+              </a:rPr>
+              <a:t>•  </a:t>
+            </a:r>
+            <a:r>
+              <a:rPr sz="1700" b="1">
+                <a:solidFill>
+                  <a:srgbClr val="0B0B0B"/>
+                </a:solidFill>
+                <a:latin typeface="Calibri"/>
+              </a:rPr>
+              <a:t>Speed matters: </a:t>
+            </a:r>
+            <a:r>
+              <a:rPr sz="1700">
+                <a:solidFill>
+                  <a:srgbClr val="0B0B0B"/>
+                </a:solidFill>
+                <a:latin typeface="Calibri"/>
+              </a:rPr>
+              <a:t>the classifier must keep up with the link's flow rate.</a:t>
+            </a:r>
+          </a:p>
+          <a:p>
+            <a:pPr>
+              <a:spcAft>
+                <a:spcPts val="1000"/>
+              </a:spcAft>
+            </a:pPr>
+            <a:r>
+              <a:rPr sz="1700" b="1">
+                <a:solidFill>
+                  <a:srgbClr val="1C5CAB"/>
+                </a:solidFill>
+              </a:rPr>
+              <a:t>•  </a:t>
+            </a:r>
+            <a:r>
+              <a:rPr sz="1700" b="1">
+                <a:solidFill>
+                  <a:srgbClr val="0B0B0B"/>
+                </a:solidFill>
+                <a:latin typeface="Calibri"/>
+              </a:rPr>
+              <a:t>Encryption is fine; </a:t>
+            </a:r>
+            <a:r>
+              <a:rPr sz="1700">
+                <a:solidFill>
+                  <a:srgbClr val="0B0B0B"/>
+                </a:solidFill>
+                <a:latin typeface="Calibri"/>
+              </a:rPr>
+              <a:t>payload attacks (SQL injection, XSS) need application logs too.</a:t>
+            </a:r>
+          </a:p>
+          <a:p>
+            <a:pPr>
+              <a:spcAft>
+                <a:spcPts val="1000"/>
+              </a:spcAft>
+            </a:pPr>
+            <a:r>
+              <a:rPr sz="1700" b="1">
+                <a:solidFill>
+                  <a:srgbClr val="1C5CAB"/>
+                </a:solidFill>
+              </a:rPr>
+              <a:t>•  </a:t>
+            </a:r>
+            <a:r>
+              <a:rPr sz="1700" b="1">
+                <a:solidFill>
+                  <a:srgbClr val="0B0B0B"/>
+                </a:solidFill>
+                <a:latin typeface="Calibri"/>
+              </a:rPr>
+              <a:t>Takeaway: </a:t>
+            </a:r>
+            <a:r>
+              <a:rPr sz="1700">
+                <a:solidFill>
+                  <a:srgbClr val="0B0B0B"/>
+                </a:solidFill>
+                <a:latin typeface="Calibri"/>
+              </a:rPr>
+              <a:t>a plain decision tree is enough; report macro F1, not accuracy; Kernel PCA is not a free win; the rare and look-alike attacks stay hard.</a:t>
+            </a:r>
+          </a:p>
+        </p:txBody>
+      </p:sp>
+    </p:spTree>
+  </p:cSld>
+  <p:clrMapOvr>
+    <a:masterClrMapping/>
+  </p:clrMapOvr>
+</p:sld>
+</file>
+
+<file path=ppt/slides/slide11.xml><?xml version="1.0" encoding="utf-8"?>
+<p:sld xmlns:a="http://schemas.openxmlformats.org/drawingml/2006/main" xmlns:p="http://schemas.openxmlformats.org/presentationml/2006/main" xmlns:r="http://schemas.openxmlformats.org/officeDocument/2006/relationships">
+  <p:cSld>
+    <p:bg>
+      <p:bgPr>
+        <a:solidFill>
+          <a:srgbClr val="FFFFFF"/>
+        </a:solidFill>
+        <a:effectLst/>
+      </p:bgPr>
+    </p:bg>
+    <p:spTree>
+      <p:nvGrpSpPr>
+        <p:cNvPr id="1" name=""/>
+        <p:cNvGrpSpPr/>
+        <p:nvPr/>
+      </p:nvGrpSpPr>
+      <p:grpSpPr/>
+      <p:sp>
+        <p:nvSpPr>
+          <p:cNvPr id="2" name="Rectangle 1"/>
+          <p:cNvSpPr/>
+          <p:nvPr/>
+        </p:nvSpPr>
+        <p:spPr>
+          <a:xfrm>
             <a:off x="0" y="2743200"/>
             <a:ext cx="12191695" cy="1463040"/>
           </a:xfrm>
@@ -3851,7 +4111,7 @@
                 </a:solidFill>
                 <a:latin typeface="Calibri"/>
               </a:rPr>
-              <a:t>that would otherwise leak across the train/test split.</a:t>
+              <a:t>that skew the class balance (we measured the leakage: it barely affects accuracy).</a:t>
             </a:r>
           </a:p>
           <a:p>
@@ -5370,7 +5630,7 @@
                 </a:solidFill>
                 <a:latin typeface="Calibri"/>
               </a:rPr>
-              <a:t>Deployment and takeaways</a:t>
+              <a:t>We tested two common assumptions. Both were wrong.</a:t>
             </a:r>
           </a:p>
         </p:txBody>
@@ -5417,7 +5677,7 @@
                 </a:solidFill>
                 <a:latin typeface="Calibri"/>
               </a:rPr>
-              <a:t>Runs beside the traffic, </a:t>
+              <a:t>"Duplicates inflate the scores." </a:t>
             </a:r>
             <a:r>
               <a:rPr sz="1700">
@@ -5426,7 +5686,7 @@
                 </a:solidFill>
                 <a:latin typeface="Calibri"/>
               </a:rPr>
-              <a:t>not inline: a verdict comes only when the flow ends.</a:t>
+              <a:t>13.2% of test rows are memorisable, yet accuracy on them is only +0.001 above unseen rows. Inflation: +0.0002.</a:t>
             </a:r>
           </a:p>
           <a:p>
@@ -5450,7 +5710,7 @@
                 </a:solidFill>
                 <a:latin typeface="Calibri"/>
               </a:rPr>
-              <a:t>Speed matters: </a:t>
+              <a:t>"Models lean on giveaway features." </a:t>
             </a:r>
             <a:r>
               <a:rPr sz="1700">
@@ -5459,7 +5719,7 @@
                 </a:solidFill>
                 <a:latin typeface="Calibri"/>
               </a:rPr>
-              <a:t>the classifier must keep up with the link's flow rate.</a:t>
+              <a:t>drop Destination Port and both TCP window features and macro F1 falls just 0.02 to 0.04. Not an artefact.</a:t>
             </a:r>
           </a:p>
           <a:p>
@@ -5483,7 +5743,7 @@
                 </a:solidFill>
                 <a:latin typeface="Calibri"/>
               </a:rPr>
-              <a:t>Encryption is fine; </a:t>
+              <a:t>Why: </a:t>
             </a:r>
             <a:r>
               <a:rPr sz="1700">
@@ -5492,7 +5752,7 @@
                 </a:solidFill>
                 <a:latin typeface="Calibri"/>
               </a:rPr>
-              <a:t>payload attacks (SQL injection, XSS) need application logs too.</a:t>
+              <a:t>unseen-row accuracy is already 0.998, so memorisation has no headroom; and 28 correlated feature pairs mean the signal simply reroutes.</a:t>
             </a:r>
           </a:p>
           <a:p>
@@ -5516,7 +5776,7 @@
                 </a:solidFill>
                 <a:latin typeface="Calibri"/>
               </a:rPr>
-              <a:t>Takeaway: </a:t>
+              <a:t>The real lesson: </a:t>
             </a:r>
             <a:r>
               <a:rPr sz="1700">
@@ -5525,7 +5785,7 @@
                 </a:solidFill>
                 <a:latin typeface="Calibri"/>
               </a:rPr>
-              <a:t>tree ensembles win; report macro F1, not accuracy; Kernel PCA is not a free win; the rare and look-alike attacks stay hard.</a:t>
+              <a:t>importance rankings mislead when features are redundant. Dedup still matters, but for class balance, not inflation.</a:t>
             </a:r>
           </a:p>
         </p:txBody>
